--- a/decks/geog-landscapes/geog-landscapes_ch5_river-journey.pptx
+++ b/decks/geog-landscapes/geog-landscapes_ch5_river-journey.pptx
@@ -126,30 +126,30 @@
   <p:extLst>
     <p:ext uri="{521415D9-36F7-43E2-AB2F-B90AF26B5E84}">
       <p14:sectionLst xmlns:p14="http://schemas.microsoft.com/office/powerpoint/2010/main">
-        <p14:section name="Opening" id="{c163cdad-f5f3-14d3-a3b2-d47e22661a52}">
+        <p14:section name="Opening" id="{71d5a04e-1bef-5a7d-d177-e1975b67801f}">
           <p14:sldIdLst>
             <p14:sldId id="256"/>
           </p14:sldIdLst>
         </p14:section>
-        <p14:section name="Gate" id="{7a541c59-c0d0-d519-f3e5-86c3c72e0b8a}">
+        <p14:section name="Gate" id="{ba38f591-9c86-69ca-32a4-b05c80336f0f}">
           <p14:sldIdLst>
             <p14:sldId id="257"/>
             <p14:sldId id="258"/>
           </p14:sldIdLst>
         </p14:section>
-        <p14:section name="Pre-teach" id="{c67df172-c961-9ee5-6c28-14a1d55074da}">
+        <p14:section name="Pre-teach" id="{c1cd8a41-3a39-8a54-4c1a-13c1e6b2daf7}">
           <p14:sldIdLst>
             <p14:sldId id="259"/>
             <p14:sldId id="260"/>
           </p14:sldIdLst>
         </p14:section>
-        <p14:section name="Read-along" id="{1551422b-2a20-60e2-abf2-1ebbea42cb10}">
+        <p14:section name="Read-along" id="{e730e6b5-7ead-1665-9258-61bdabf15853}">
           <p14:sldIdLst>
             <p14:sldId id="261"/>
             <p14:sldId id="262"/>
           </p14:sldIdLst>
         </p14:section>
-        <p14:section name="Teach" id="{2f98d269-5a17-a1b8-2fa5-c9062004199f}">
+        <p14:section name="Teach" id="{9ada57ef-2e7c-5b0f-272f-978a6113fe8f}">
           <p14:sldIdLst>
             <p14:sldId id="263"/>
             <p14:sldId id="264"/>
@@ -158,7 +158,7 @@
             <p14:sldId id="267"/>
           </p14:sldIdLst>
         </p14:section>
-        <p14:section name="Routes" id="{9a3f8719-562b-aee6-536c-62d6f3231c28}">
+        <p14:section name="Routes" id="{63b17698-f0c1-171c-0d67-08c978c35db8}">
           <p14:sldIdLst>
             <p14:sldId id="268"/>
             <p14:sldId id="269"/>
@@ -166,12 +166,12 @@
             <p14:sldId id="271"/>
           </p14:sldIdLst>
         </p14:section>
-        <p14:section name="Close" id="{07fd4aea-895a-600f-e6d9-7670bfeee763}">
+        <p14:section name="Close" id="{29ffc1a1-9f13-4ed0-2368-e7d8be85ff56}">
           <p14:sldIdLst>
             <p14:sldId id="272"/>
           </p14:sldIdLst>
         </p14:section>
-        <p14:section name="Answers" id="{2ad316f7-83ee-f5a4-5145-a44a04fe0e58}">
+        <p14:section name="Answers" id="{ed2b8076-461f-8626-bcc7-fce19cfbf0bd}">
           <p14:sldIdLst>
             <p14:sldId id="273"/>
             <p14:sldId id="274"/>
@@ -9624,7 +9624,7 @@
                 <a:ea typeface="Calibri" pitchFamily="34" charset="-122"/>
                 <a:cs typeface="Calibri" pitchFamily="34" charset="-120"/>
               </a:rPr>
-              <a:t>Source</a:t>
+              <a:t>Watershed</a:t>
             </a:r>
             <a:endParaRPr lang="en-US" sz="2400" dirty="0"/>
           </a:p>
@@ -9661,7 +9661,7 @@
                 <a:ea typeface="Calibri" pitchFamily="34" charset="-122"/>
                 <a:cs typeface="Calibri" pitchFamily="34" charset="-120"/>
               </a:rPr>
-              <a:t>Watershed</a:t>
+              <a:t>Mouth</a:t>
             </a:r>
             <a:endParaRPr lang="en-US" sz="2400" dirty="0"/>
           </a:p>
@@ -9698,7 +9698,7 @@
                 <a:ea typeface="Calibri" pitchFamily="34" charset="-122"/>
                 <a:cs typeface="Calibri" pitchFamily="34" charset="-120"/>
               </a:rPr>
-              <a:t>Mouth</a:t>
+              <a:t>Source</a:t>
             </a:r>
             <a:endParaRPr lang="en-US" sz="2400" dirty="0"/>
           </a:p>
@@ -11392,7 +11392,7 @@
                 <a:ea typeface="Calibri" pitchFamily="34" charset="-122"/>
                 <a:cs typeface="Calibri" pitchFamily="34" charset="-120"/>
               </a:rPr>
-              <a:t>Source</a:t>
+              <a:t>Watershed</a:t>
             </a:r>
             <a:endParaRPr lang="en-US" sz="2400" dirty="0"/>
           </a:p>
@@ -11429,7 +11429,7 @@
                 <a:ea typeface="Calibri" pitchFamily="34" charset="-122"/>
                 <a:cs typeface="Calibri" pitchFamily="34" charset="-120"/>
               </a:rPr>
-              <a:t>Watershed</a:t>
+              <a:t>Mouth</a:t>
             </a:r>
             <a:endParaRPr lang="en-US" sz="2400" dirty="0"/>
           </a:p>
@@ -11466,7 +11466,7 @@
                 <a:ea typeface="Calibri" pitchFamily="34" charset="-122"/>
                 <a:cs typeface="Calibri" pitchFamily="34" charset="-120"/>
               </a:rPr>
-              <a:t>Mouth</a:t>
+              <a:t>Source</a:t>
             </a:r>
             <a:endParaRPr lang="en-US" sz="2400" dirty="0"/>
           </a:p>
@@ -11905,7 +11905,7 @@
                 <a:ea typeface="Calibri" pitchFamily="34" charset="-122"/>
                 <a:cs typeface="Calibri" pitchFamily="34" charset="-120"/>
               </a:rPr>
-              <a:t>flows slowest and deposits sand to form a slip-off slope</a:t>
+              <a:t>stops moving and dries out</a:t>
             </a:r>
             <a:endParaRPr lang="en-US" sz="1800" dirty="0"/>
           </a:p>
@@ -11942,7 +11942,7 @@
                 <a:ea typeface="Calibri" pitchFamily="34" charset="-122"/>
                 <a:cs typeface="Calibri" pitchFamily="34" charset="-120"/>
               </a:rPr>
-              <a:t>stops moving and dries out</a:t>
+              <a:t>flows slowest and deposits sand to form a slip-off slope</a:t>
             </a:r>
             <a:endParaRPr lang="en-US" sz="1800" dirty="0"/>
           </a:p>

--- a/decks/geog-landscapes/geog-landscapes_ch5_river-journey.pptx
+++ b/decks/geog-landscapes/geog-landscapes_ch5_river-journey.pptx
@@ -126,30 +126,30 @@
   <p:extLst>
     <p:ext uri="{521415D9-36F7-43E2-AB2F-B90AF26B5E84}">
       <p14:sectionLst xmlns:p14="http://schemas.microsoft.com/office/powerpoint/2010/main">
-        <p14:section name="Opening" id="{71d5a04e-1bef-5a7d-d177-e1975b67801f}">
+        <p14:section name="Opening" id="{27138cb5-0b98-96e1-9679-d568ea7643d0}">
           <p14:sldIdLst>
             <p14:sldId id="256"/>
           </p14:sldIdLst>
         </p14:section>
-        <p14:section name="Gate" id="{ba38f591-9c86-69ca-32a4-b05c80336f0f}">
+        <p14:section name="Gate" id="{4463353c-09dc-06f1-49f1-8892f47f3832}">
           <p14:sldIdLst>
             <p14:sldId id="257"/>
             <p14:sldId id="258"/>
           </p14:sldIdLst>
         </p14:section>
-        <p14:section name="Pre-teach" id="{c1cd8a41-3a39-8a54-4c1a-13c1e6b2daf7}">
+        <p14:section name="Pre-teach" id="{e6cfae11-4155-0f3f-4b16-5c1fff467c22}">
           <p14:sldIdLst>
             <p14:sldId id="259"/>
             <p14:sldId id="260"/>
           </p14:sldIdLst>
         </p14:section>
-        <p14:section name="Read-along" id="{e730e6b5-7ead-1665-9258-61bdabf15853}">
+        <p14:section name="Read-along" id="{6b1bb54d-6040-5b3d-967c-924e98b04feb}">
           <p14:sldIdLst>
             <p14:sldId id="261"/>
             <p14:sldId id="262"/>
           </p14:sldIdLst>
         </p14:section>
-        <p14:section name="Teach" id="{9ada57ef-2e7c-5b0f-272f-978a6113fe8f}">
+        <p14:section name="Teach" id="{a1546e45-02c4-4d95-cece-3d892f96f8bc}">
           <p14:sldIdLst>
             <p14:sldId id="263"/>
             <p14:sldId id="264"/>
@@ -158,7 +158,7 @@
             <p14:sldId id="267"/>
           </p14:sldIdLst>
         </p14:section>
-        <p14:section name="Routes" id="{63b17698-f0c1-171c-0d67-08c978c35db8}">
+        <p14:section name="Routes" id="{1c0441d2-a064-407e-3f65-1821be2b5944}">
           <p14:sldIdLst>
             <p14:sldId id="268"/>
             <p14:sldId id="269"/>
@@ -166,12 +166,12 @@
             <p14:sldId id="271"/>
           </p14:sldIdLst>
         </p14:section>
-        <p14:section name="Close" id="{29ffc1a1-9f13-4ed0-2368-e7d8be85ff56}">
+        <p14:section name="Close" id="{f99f9f06-1405-c034-b545-a6e4e790f0e2}">
           <p14:sldIdLst>
             <p14:sldId id="272"/>
           </p14:sldIdLst>
         </p14:section>
-        <p14:section name="Answers" id="{ed2b8076-461f-8626-bcc7-fce19cfbf0bd}">
+        <p14:section name="Answers" id="{c5604a25-509a-5420-6ebc-8b7389281aca}">
           <p14:sldIdLst>
             <p14:sldId id="273"/>
             <p14:sldId id="274"/>
